--- a/презентация/Нахождение отрезка_конечная Версия-4.pptx
+++ b/презентация/Нахождение отрезка_конечная Версия-4.pptx
@@ -5,7 +5,7 @@
     <p:sldMasterId id="2147483648" r:id="rId1"/>
   </p:sldMasterIdLst>
   <p:notesMasterIdLst>
-    <p:notesMasterId r:id="rId28"/>
+    <p:notesMasterId r:id="rId29"/>
   </p:notesMasterIdLst>
   <p:sldIdLst>
     <p:sldId id="256" r:id="rId2"/>
@@ -26,14 +26,15 @@
     <p:sldId id="279" r:id="rId17"/>
     <p:sldId id="296" r:id="rId18"/>
     <p:sldId id="264" r:id="rId19"/>
-    <p:sldId id="288" r:id="rId20"/>
-    <p:sldId id="266" r:id="rId21"/>
-    <p:sldId id="286" r:id="rId22"/>
-    <p:sldId id="287" r:id="rId23"/>
-    <p:sldId id="268" r:id="rId24"/>
-    <p:sldId id="269" r:id="rId25"/>
-    <p:sldId id="291" r:id="rId26"/>
-    <p:sldId id="292" r:id="rId27"/>
+    <p:sldId id="297" r:id="rId20"/>
+    <p:sldId id="298" r:id="rId21"/>
+    <p:sldId id="266" r:id="rId22"/>
+    <p:sldId id="286" r:id="rId23"/>
+    <p:sldId id="287" r:id="rId24"/>
+    <p:sldId id="268" r:id="rId25"/>
+    <p:sldId id="269" r:id="rId26"/>
+    <p:sldId id="291" r:id="rId27"/>
+    <p:sldId id="292" r:id="rId28"/>
   </p:sldIdLst>
   <p:sldSz cx="12192000" cy="6858000"/>
   <p:notesSz cx="6858000" cy="9144000"/>
@@ -233,7 +234,7 @@
           <a:p>
             <a:fld id="{8C86AB17-56FD-4EDD-9EEB-F3D57CEC3577}" type="datetimeFigureOut">
               <a:rPr lang="ru-RU" smtClean="0"/>
-              <a:t>26.04.2026</a:t>
+              <a:t>28.04.2026</a:t>
             </a:fld>
             <a:endParaRPr lang="ru-RU"/>
           </a:p>
@@ -815,7 +816,7 @@
           <a:p>
             <a:fld id="{72A4CADC-3382-474D-A975-F78C8D475467}" type="datetime1">
               <a:rPr lang="ru-RU" smtClean="0"/>
-              <a:t>26.04.2026</a:t>
+              <a:t>28.04.2026</a:t>
             </a:fld>
             <a:endParaRPr lang="ru-RU"/>
           </a:p>
@@ -1013,7 +1014,7 @@
           <a:p>
             <a:fld id="{B358BA30-D9A6-428E-A4C8-54552A86351F}" type="datetime1">
               <a:rPr lang="ru-RU" smtClean="0"/>
-              <a:t>26.04.2026</a:t>
+              <a:t>28.04.2026</a:t>
             </a:fld>
             <a:endParaRPr lang="ru-RU"/>
           </a:p>
@@ -1221,7 +1222,7 @@
           <a:p>
             <a:fld id="{EF123AC5-0029-452E-8876-F32F9297054F}" type="datetime1">
               <a:rPr lang="ru-RU" smtClean="0"/>
-              <a:t>26.04.2026</a:t>
+              <a:t>28.04.2026</a:t>
             </a:fld>
             <a:endParaRPr lang="ru-RU"/>
           </a:p>
@@ -1419,7 +1420,7 @@
           <a:p>
             <a:fld id="{D8743EA2-CCF3-45C7-9117-7104088D4F6E}" type="datetime1">
               <a:rPr lang="ru-RU" smtClean="0"/>
-              <a:t>26.04.2026</a:t>
+              <a:t>28.04.2026</a:t>
             </a:fld>
             <a:endParaRPr lang="ru-RU"/>
           </a:p>
@@ -1694,7 +1695,7 @@
           <a:p>
             <a:fld id="{589EA51A-F4B2-4EEF-A983-7B6329173CF4}" type="datetime1">
               <a:rPr lang="ru-RU" smtClean="0"/>
-              <a:t>26.04.2026</a:t>
+              <a:t>28.04.2026</a:t>
             </a:fld>
             <a:endParaRPr lang="ru-RU"/>
           </a:p>
@@ -1959,7 +1960,7 @@
           <a:p>
             <a:fld id="{40D6CEC6-DCF2-4957-99A2-338F0D0C7DB9}" type="datetime1">
               <a:rPr lang="ru-RU" smtClean="0"/>
-              <a:t>26.04.2026</a:t>
+              <a:t>28.04.2026</a:t>
             </a:fld>
             <a:endParaRPr lang="ru-RU"/>
           </a:p>
@@ -2371,7 +2372,7 @@
           <a:p>
             <a:fld id="{7796AADA-1886-4D87-B0DD-D7F3FE984392}" type="datetime1">
               <a:rPr lang="ru-RU" smtClean="0"/>
-              <a:t>26.04.2026</a:t>
+              <a:t>28.04.2026</a:t>
             </a:fld>
             <a:endParaRPr lang="ru-RU"/>
           </a:p>
@@ -2512,7 +2513,7 @@
           <a:p>
             <a:fld id="{0BF9FE6E-4BA1-440F-A046-DF16E394809F}" type="datetime1">
               <a:rPr lang="ru-RU" smtClean="0"/>
-              <a:t>26.04.2026</a:t>
+              <a:t>28.04.2026</a:t>
             </a:fld>
             <a:endParaRPr lang="ru-RU"/>
           </a:p>
@@ -2625,7 +2626,7 @@
           <a:p>
             <a:fld id="{E844C97D-4141-4FE1-A15E-912A6DAC5A4C}" type="datetime1">
               <a:rPr lang="ru-RU" smtClean="0"/>
-              <a:t>26.04.2026</a:t>
+              <a:t>28.04.2026</a:t>
             </a:fld>
             <a:endParaRPr lang="ru-RU"/>
           </a:p>
@@ -2936,7 +2937,7 @@
           <a:p>
             <a:fld id="{6E7ECAD8-8884-4249-8250-598957BF1BDE}" type="datetime1">
               <a:rPr lang="ru-RU" smtClean="0"/>
-              <a:t>26.04.2026</a:t>
+              <a:t>28.04.2026</a:t>
             </a:fld>
             <a:endParaRPr lang="ru-RU"/>
           </a:p>
@@ -3224,7 +3225,7 @@
           <a:p>
             <a:fld id="{5417CA92-FD4B-42BB-9539-C886DE833EC1}" type="datetime1">
               <a:rPr lang="ru-RU" smtClean="0"/>
-              <a:t>26.04.2026</a:t>
+              <a:t>28.04.2026</a:t>
             </a:fld>
             <a:endParaRPr lang="ru-RU"/>
           </a:p>
@@ -3468,7 +3469,7 @@
           <a:p>
             <a:fld id="{9F115E6B-9DC2-458B-81A7-FDE905116530}" type="datetime1">
               <a:rPr lang="ru-RU" smtClean="0"/>
-              <a:t>26.04.2026</a:t>
+              <a:t>28.04.2026</a:t>
             </a:fld>
             <a:endParaRPr lang="ru-RU"/>
           </a:p>
@@ -6083,8 +6084,8 @@
           </a:p>
         </p:txBody>
       </p:sp>
-      <mc:AlternateContent xmlns:mc="http://schemas.openxmlformats.org/markup-compatibility/2006">
-        <mc:Choice xmlns:a14="http://schemas.microsoft.com/office/drawing/2010/main" Requires="a14">
+      <mc:AlternateContent xmlns:mc="http://schemas.openxmlformats.org/markup-compatibility/2006" xmlns:a14="http://schemas.microsoft.com/office/drawing/2010/main">
+        <mc:Choice Requires="a14">
           <p:sp>
             <p:nvSpPr>
               <p:cNvPr id="7" name="TextBox 6">
@@ -6933,7 +6934,7 @@
             </p:txBody>
           </p:sp>
         </mc:Choice>
-        <mc:Fallback>
+        <mc:Fallback xmlns="">
           <p:sp>
             <p:nvSpPr>
               <p:cNvPr id="7" name="TextBox 6">
@@ -21385,42 +21386,6 @@
           </a:p>
         </p:txBody>
       </p:sp>
-      <p:pic>
-        <p:nvPicPr>
-          <p:cNvPr id="7" name="Рисунок 6">
-            <a:extLst>
-              <a:ext uri="{FF2B5EF4-FFF2-40B4-BE49-F238E27FC236}">
-                <a16:creationId xmlns:a16="http://schemas.microsoft.com/office/drawing/2014/main" id="{1430DFF7-73A4-429D-B875-D3565312BD14}"/>
-              </a:ext>
-            </a:extLst>
-          </p:cNvPr>
-          <p:cNvPicPr>
-            <a:picLocks noChangeAspect="1"/>
-          </p:cNvPicPr>
-          <p:nvPr/>
-        </p:nvPicPr>
-        <p:blipFill>
-          <a:blip r:embed="rId2">
-            <a:extLst>
-              <a:ext uri="{28A0092B-C50C-407E-A947-70E740481C1C}">
-                <a14:useLocalDpi xmlns:a14="http://schemas.microsoft.com/office/drawing/2010/main" val="0"/>
-              </a:ext>
-            </a:extLst>
-          </a:blip>
-          <a:stretch>
-            <a:fillRect/>
-          </a:stretch>
-        </p:blipFill>
-        <p:spPr>
-          <a:xfrm>
-            <a:off x="0" y="1077225"/>
-            <a:ext cx="12192000" cy="4703549"/>
-          </a:xfrm>
-          <a:prstGeom prst="rect">
-            <a:avLst/>
-          </a:prstGeom>
-        </p:spPr>
-      </p:pic>
       <p:sp>
         <p:nvSpPr>
           <p:cNvPr id="3" name="TextBox 2">
@@ -21459,6 +21424,36 @@
           </a:p>
         </p:txBody>
       </p:sp>
+      <p:pic>
+        <p:nvPicPr>
+          <p:cNvPr id="4" name="Рисунок 3">
+            <a:extLst>
+              <a:ext uri="{FF2B5EF4-FFF2-40B4-BE49-F238E27FC236}">
+                <a16:creationId xmlns:a16="http://schemas.microsoft.com/office/drawing/2014/main" id="{2313A082-1609-826F-34C9-72309F264E82}"/>
+              </a:ext>
+            </a:extLst>
+          </p:cNvPr>
+          <p:cNvPicPr>
+            <a:picLocks noChangeAspect="1"/>
+          </p:cNvPicPr>
+          <p:nvPr/>
+        </p:nvPicPr>
+        <p:blipFill>
+          <a:blip r:embed="rId2"/>
+          <a:stretch>
+            <a:fillRect/>
+          </a:stretch>
+        </p:blipFill>
+        <p:spPr>
+          <a:xfrm>
+            <a:off x="71713" y="925195"/>
+            <a:ext cx="12018547" cy="4635186"/>
+          </a:xfrm>
+          <a:prstGeom prst="rect">
+            <a:avLst/>
+          </a:prstGeom>
+        </p:spPr>
+      </p:pic>
     </p:spTree>
     <p:extLst>
       <p:ext uri="{BB962C8B-B14F-4D97-AF65-F5344CB8AC3E}">
@@ -21477,7 +21472,13 @@
   <p:cSld>
     <p:spTree>
       <p:nvGrpSpPr>
-        <p:cNvPr id="1" name=""/>
+        <p:cNvPr id="1" name="">
+          <a:extLst>
+            <a:ext uri="{FF2B5EF4-FFF2-40B4-BE49-F238E27FC236}">
+              <a16:creationId xmlns:a16="http://schemas.microsoft.com/office/drawing/2014/main" id="{890411BD-7776-11F7-9DF1-CA64B7917F5B}"/>
+            </a:ext>
+          </a:extLst>
+        </p:cNvPr>
         <p:cNvGrpSpPr/>
         <p:nvPr/>
       </p:nvGrpSpPr>
@@ -21494,7 +21495,7 @@
           <p:cNvPr id="5" name="Номер слайда 4">
             <a:extLst>
               <a:ext uri="{FF2B5EF4-FFF2-40B4-BE49-F238E27FC236}">
-                <a16:creationId xmlns:a16="http://schemas.microsoft.com/office/drawing/2014/main" id="{96640FEC-C7EC-4559-BC40-8F39882A5E1B}"/>
+                <a16:creationId xmlns:a16="http://schemas.microsoft.com/office/drawing/2014/main" id="{89CE3129-D210-7694-6247-ECF019659FD0}"/>
               </a:ext>
             </a:extLst>
           </p:cNvPr>
@@ -21544,7 +21545,7 @@
           <p:cNvPr id="6" name="Заголовок 1">
             <a:extLst>
               <a:ext uri="{FF2B5EF4-FFF2-40B4-BE49-F238E27FC236}">
-                <a16:creationId xmlns:a16="http://schemas.microsoft.com/office/drawing/2014/main" id="{B2994271-8424-4FBF-84F0-AC4257A74DF6}"/>
+                <a16:creationId xmlns:a16="http://schemas.microsoft.com/office/drawing/2014/main" id="{C6294CE0-CDA6-E10C-4034-F9AA4EAEF16E}"/>
               </a:ext>
             </a:extLst>
           </p:cNvPr>
@@ -21557,8 +21558,8 @@
         </p:nvSpPr>
         <p:spPr>
           <a:xfrm>
-            <a:off x="900000" y="0"/>
-            <a:ext cx="10515600" cy="925195"/>
+            <a:off x="838200" y="0"/>
+            <a:ext cx="10515600" cy="683148"/>
           </a:xfrm>
         </p:spPr>
         <p:txBody>
@@ -21583,7 +21584,7 @@
           <p:cNvPr id="2" name="AutoShape 2">
             <a:extLst>
               <a:ext uri="{FF2B5EF4-FFF2-40B4-BE49-F238E27FC236}">
-                <a16:creationId xmlns:a16="http://schemas.microsoft.com/office/drawing/2014/main" id="{D5327423-793A-4273-BB64-B8B00B5C712F}"/>
+                <a16:creationId xmlns:a16="http://schemas.microsoft.com/office/drawing/2014/main" id="{BA7D3458-341B-74B3-C31D-B680F4639FDC}"/>
               </a:ext>
             </a:extLst>
           </p:cNvPr>
@@ -21625,10 +21626,10 @@
       </p:sp>
       <p:pic>
         <p:nvPicPr>
-          <p:cNvPr id="4" name="Рисунок 3">
+          <p:cNvPr id="3" name="Рисунок 2">
             <a:extLst>
               <a:ext uri="{FF2B5EF4-FFF2-40B4-BE49-F238E27FC236}">
-                <a16:creationId xmlns:a16="http://schemas.microsoft.com/office/drawing/2014/main" id="{296FDA20-20C2-4969-9CFD-06ABD0EC68C5}"/>
+                <a16:creationId xmlns:a16="http://schemas.microsoft.com/office/drawing/2014/main" id="{A591158F-8C7B-E1A9-1764-68B5F4D0F602}"/>
               </a:ext>
             </a:extLst>
           </p:cNvPr>
@@ -21638,21 +21639,15 @@
           <p:nvPr/>
         </p:nvPicPr>
         <p:blipFill>
-          <a:blip r:embed="rId2">
-            <a:extLst>
-              <a:ext uri="{28A0092B-C50C-407E-A947-70E740481C1C}">
-                <a14:useLocalDpi xmlns:a14="http://schemas.microsoft.com/office/drawing/2010/main" val="0"/>
-              </a:ext>
-            </a:extLst>
-          </a:blip>
+          <a:blip r:embed="rId2"/>
           <a:stretch>
             <a:fillRect/>
           </a:stretch>
         </p:blipFill>
         <p:spPr>
           <a:xfrm>
-            <a:off x="869419" y="925195"/>
-            <a:ext cx="10148362" cy="5606082"/>
+            <a:off x="1962567" y="537882"/>
+            <a:ext cx="7991627" cy="6269630"/>
           </a:xfrm>
           <a:prstGeom prst="rect">
             <a:avLst/>
@@ -21662,7 +21657,7 @@
     </p:spTree>
     <p:extLst>
       <p:ext uri="{BB962C8B-B14F-4D97-AF65-F5344CB8AC3E}">
-        <p14:creationId xmlns:p14="http://schemas.microsoft.com/office/powerpoint/2010/main" val="419273562"/>
+        <p14:creationId xmlns:p14="http://schemas.microsoft.com/office/powerpoint/2010/main" val="2653076587"/>
       </p:ext>
     </p:extLst>
   </p:cSld>
@@ -21935,6 +21930,206 @@
   <p:cSld>
     <p:spTree>
       <p:nvGrpSpPr>
+        <p:cNvPr id="1" name="">
+          <a:extLst>
+            <a:ext uri="{FF2B5EF4-FFF2-40B4-BE49-F238E27FC236}">
+              <a16:creationId xmlns:a16="http://schemas.microsoft.com/office/drawing/2014/main" id="{B7611F40-BBD2-B145-73AC-71FBAF070456}"/>
+            </a:ext>
+          </a:extLst>
+        </p:cNvPr>
+        <p:cNvGrpSpPr/>
+        <p:nvPr/>
+      </p:nvGrpSpPr>
+      <p:grpSpPr>
+        <a:xfrm>
+          <a:off x="0" y="0"/>
+          <a:ext cx="0" cy="0"/>
+          <a:chOff x="0" y="0"/>
+          <a:chExt cx="0" cy="0"/>
+        </a:xfrm>
+      </p:grpSpPr>
+      <p:sp>
+        <p:nvSpPr>
+          <p:cNvPr id="5" name="Номер слайда 4">
+            <a:extLst>
+              <a:ext uri="{FF2B5EF4-FFF2-40B4-BE49-F238E27FC236}">
+                <a16:creationId xmlns:a16="http://schemas.microsoft.com/office/drawing/2014/main" id="{823170C8-B79F-DDB0-DEAC-69BD4DD68291}"/>
+              </a:ext>
+            </a:extLst>
+          </p:cNvPr>
+          <p:cNvSpPr>
+            <a:spLocks noGrp="1"/>
+          </p:cNvSpPr>
+          <p:nvPr>
+            <p:ph type="sldNum" sz="quarter" idx="12"/>
+          </p:nvPr>
+        </p:nvSpPr>
+        <p:spPr>
+          <a:xfrm>
+            <a:off x="9000000" y="6120000"/>
+            <a:ext cx="2743200" cy="365125"/>
+          </a:xfrm>
+        </p:spPr>
+        <p:txBody>
+          <a:bodyPr lIns="0" tIns="36000" rIns="0" bIns="36000"/>
+          <a:lstStyle/>
+          <a:p>
+            <a:fld id="{8346BD07-4451-4F99-9781-57091C949674}" type="slidenum">
+              <a:rPr lang="ru-RU" sz="1400" b="1" smtClean="0">
+                <a:solidFill>
+                  <a:schemeClr val="accent6">
+                    <a:lumMod val="50000"/>
+                  </a:schemeClr>
+                </a:solidFill>
+                <a:latin typeface="Times New Roman" panose="02020603050405020304" pitchFamily="18" charset="0"/>
+                <a:cs typeface="Times New Roman" panose="02020603050405020304" pitchFamily="18" charset="0"/>
+              </a:rPr>
+              <a:t>20</a:t>
+            </a:fld>
+            <a:endParaRPr lang="ru-RU" sz="1400" b="1" dirty="0">
+              <a:solidFill>
+                <a:schemeClr val="accent6">
+                  <a:lumMod val="50000"/>
+                </a:schemeClr>
+              </a:solidFill>
+              <a:latin typeface="Times New Roman" panose="02020603050405020304" pitchFamily="18" charset="0"/>
+              <a:cs typeface="Times New Roman" panose="02020603050405020304" pitchFamily="18" charset="0"/>
+            </a:endParaRPr>
+          </a:p>
+        </p:txBody>
+      </p:sp>
+      <p:sp>
+        <p:nvSpPr>
+          <p:cNvPr id="6" name="Заголовок 1">
+            <a:extLst>
+              <a:ext uri="{FF2B5EF4-FFF2-40B4-BE49-F238E27FC236}">
+                <a16:creationId xmlns:a16="http://schemas.microsoft.com/office/drawing/2014/main" id="{F667A287-DD7F-C168-2181-E54F6A712039}"/>
+              </a:ext>
+            </a:extLst>
+          </p:cNvPr>
+          <p:cNvSpPr>
+            <a:spLocks noGrp="1"/>
+          </p:cNvSpPr>
+          <p:nvPr>
+            <p:ph type="title"/>
+          </p:nvPr>
+        </p:nvSpPr>
+        <p:spPr>
+          <a:xfrm>
+            <a:off x="899999" y="-9496"/>
+            <a:ext cx="10515600" cy="552320"/>
+          </a:xfrm>
+        </p:spPr>
+        <p:txBody>
+          <a:bodyPr>
+            <a:normAutofit/>
+          </a:bodyPr>
+          <a:lstStyle/>
+          <a:p>
+            <a:pPr algn="ctr"/>
+            <a:r>
+              <a:rPr lang="ru-RU" sz="3200" b="1" dirty="0">
+                <a:latin typeface="Times New Roman" panose="02020603050405020304" pitchFamily="18" charset="0"/>
+                <a:cs typeface="Times New Roman" panose="02020603050405020304" pitchFamily="18" charset="0"/>
+              </a:rPr>
+              <a:t>Структура программы</a:t>
+            </a:r>
+          </a:p>
+        </p:txBody>
+      </p:sp>
+      <p:sp>
+        <p:nvSpPr>
+          <p:cNvPr id="2" name="AutoShape 2">
+            <a:extLst>
+              <a:ext uri="{FF2B5EF4-FFF2-40B4-BE49-F238E27FC236}">
+                <a16:creationId xmlns:a16="http://schemas.microsoft.com/office/drawing/2014/main" id="{3EB053F5-E271-7BC2-E557-4DF24D6C4EA4}"/>
+              </a:ext>
+            </a:extLst>
+          </p:cNvPr>
+          <p:cNvSpPr>
+            <a:spLocks noChangeAspect="1" noChangeArrowheads="1"/>
+          </p:cNvSpPr>
+          <p:nvPr/>
+        </p:nvSpPr>
+        <p:spPr bwMode="auto">
+          <a:xfrm>
+            <a:off x="5943600" y="3276600"/>
+            <a:ext cx="304800" cy="304800"/>
+          </a:xfrm>
+          <a:prstGeom prst="rect">
+            <a:avLst/>
+          </a:prstGeom>
+          <a:noFill/>
+          <a:extLst>
+            <a:ext uri="{909E8E84-426E-40DD-AFC4-6F175D3DCCD1}">
+              <a14:hiddenFill xmlns:a14="http://schemas.microsoft.com/office/drawing/2010/main">
+                <a:solidFill>
+                  <a:srgbClr val="FFFFFF"/>
+                </a:solidFill>
+              </a14:hiddenFill>
+            </a:ext>
+          </a:extLst>
+        </p:spPr>
+        <p:txBody>
+          <a:bodyPr vert="horz" wrap="square" lIns="91440" tIns="45720" rIns="91440" bIns="45720" numCol="1" anchor="t" anchorCtr="0" compatLnSpc="1">
+            <a:prstTxWarp prst="textNoShape">
+              <a:avLst/>
+            </a:prstTxWarp>
+          </a:bodyPr>
+          <a:lstStyle/>
+          <a:p>
+            <a:endParaRPr lang="ru-RU"/>
+          </a:p>
+        </p:txBody>
+      </p:sp>
+      <p:pic>
+        <p:nvPicPr>
+          <p:cNvPr id="7" name="Рисунок 6">
+            <a:extLst>
+              <a:ext uri="{FF2B5EF4-FFF2-40B4-BE49-F238E27FC236}">
+                <a16:creationId xmlns:a16="http://schemas.microsoft.com/office/drawing/2014/main" id="{6C410D9C-6E08-BC58-5250-BD3D5A697AE3}"/>
+              </a:ext>
+            </a:extLst>
+          </p:cNvPr>
+          <p:cNvPicPr>
+            <a:picLocks noChangeAspect="1"/>
+          </p:cNvPicPr>
+          <p:nvPr/>
+        </p:nvPicPr>
+        <p:blipFill>
+          <a:blip r:embed="rId2"/>
+          <a:stretch>
+            <a:fillRect/>
+          </a:stretch>
+        </p:blipFill>
+        <p:spPr>
+          <a:xfrm>
+            <a:off x="2348754" y="448428"/>
+            <a:ext cx="7384934" cy="6362877"/>
+          </a:xfrm>
+          <a:prstGeom prst="rect">
+            <a:avLst/>
+          </a:prstGeom>
+        </p:spPr>
+      </p:pic>
+    </p:spTree>
+    <p:extLst>
+      <p:ext uri="{BB962C8B-B14F-4D97-AF65-F5344CB8AC3E}">
+        <p14:creationId xmlns:p14="http://schemas.microsoft.com/office/powerpoint/2010/main" val="2144257972"/>
+      </p:ext>
+    </p:extLst>
+  </p:cSld>
+  <p:clrMapOvr>
+    <a:masterClrMapping/>
+  </p:clrMapOvr>
+</p:sld>
+</file>
+
+<file path=ppt/slides/slide21.xml><?xml version="1.0" encoding="utf-8"?>
+<p:sld xmlns:a="http://schemas.openxmlformats.org/drawingml/2006/main" xmlns:r="http://schemas.openxmlformats.org/officeDocument/2006/relationships" xmlns:p="http://schemas.openxmlformats.org/presentationml/2006/main">
+  <p:cSld>
+    <p:spTree>
+      <p:nvGrpSpPr>
         <p:cNvPr id="1" name=""/>
         <p:cNvGrpSpPr/>
         <p:nvPr/>
@@ -21983,7 +22178,7 @@
                 <a:latin typeface="Times New Roman" panose="02020603050405020304" pitchFamily="18" charset="0"/>
                 <a:cs typeface="Times New Roman" panose="02020603050405020304" pitchFamily="18" charset="0"/>
               </a:rPr>
-              <a:t>20</a:t>
+              <a:t>21</a:t>
             </a:fld>
             <a:endParaRPr lang="ru-RU" sz="1400" b="1" dirty="0">
               <a:solidFill>
@@ -22430,7 +22625,7 @@
 </p:sld>
 </file>
 
-<file path=ppt/slides/slide21.xml><?xml version="1.0" encoding="utf-8"?>
+<file path=ppt/slides/slide22.xml><?xml version="1.0" encoding="utf-8"?>
 <p:sld xmlns:a="http://schemas.openxmlformats.org/drawingml/2006/main" xmlns:r="http://schemas.openxmlformats.org/officeDocument/2006/relationships" xmlns:p="http://schemas.openxmlformats.org/presentationml/2006/main">
   <p:cSld>
     <p:spTree>
@@ -22509,7 +22704,7 @@
           <a:p>
             <a:fld id="{8346BD07-4451-4F99-9781-57091C949674}" type="slidenum">
               <a:rPr lang="ru-RU" smtClean="0"/>
-              <a:t>21</a:t>
+              <a:t>22</a:t>
             </a:fld>
             <a:endParaRPr lang="ru-RU"/>
           </a:p>
@@ -22893,7 +23088,7 @@
 </p:sld>
 </file>
 
-<file path=ppt/slides/slide22.xml><?xml version="1.0" encoding="utf-8"?>
+<file path=ppt/slides/slide23.xml><?xml version="1.0" encoding="utf-8"?>
 <p:sld xmlns:a="http://schemas.openxmlformats.org/drawingml/2006/main" xmlns:r="http://schemas.openxmlformats.org/officeDocument/2006/relationships" xmlns:p="http://schemas.openxmlformats.org/presentationml/2006/main">
   <p:cSld>
     <p:spTree>
@@ -22972,7 +23167,7 @@
           <a:p>
             <a:fld id="{8346BD07-4451-4F99-9781-57091C949674}" type="slidenum">
               <a:rPr lang="ru-RU" smtClean="0"/>
-              <a:t>22</a:t>
+              <a:t>23</a:t>
             </a:fld>
             <a:endParaRPr lang="ru-RU"/>
           </a:p>
@@ -23168,7 +23363,7 @@
 </p:sld>
 </file>
 
-<file path=ppt/slides/slide23.xml><?xml version="1.0" encoding="utf-8"?>
+<file path=ppt/slides/slide24.xml><?xml version="1.0" encoding="utf-8"?>
 <p:sld xmlns:a="http://schemas.openxmlformats.org/drawingml/2006/main" xmlns:r="http://schemas.openxmlformats.org/officeDocument/2006/relationships" xmlns:p="http://schemas.openxmlformats.org/presentationml/2006/main">
   <p:cSld>
     <p:spTree>
@@ -23221,7 +23416,7 @@
                 <a:latin typeface="Times New Roman" panose="02020603050405020304" pitchFamily="18" charset="0"/>
                 <a:cs typeface="Times New Roman" panose="02020603050405020304" pitchFamily="18" charset="0"/>
               </a:rPr>
-              <a:t>23</a:t>
+              <a:t>24</a:t>
             </a:fld>
             <a:endParaRPr lang="ru-RU" sz="1400" b="1" dirty="0">
               <a:solidFill>
@@ -23411,7 +23606,7 @@
 </p:sld>
 </file>
 
-<file path=ppt/slides/slide24.xml><?xml version="1.0" encoding="utf-8"?>
+<file path=ppt/slides/slide25.xml><?xml version="1.0" encoding="utf-8"?>
 <p:sld xmlns:a="http://schemas.openxmlformats.org/drawingml/2006/main" xmlns:r="http://schemas.openxmlformats.org/officeDocument/2006/relationships" xmlns:p="http://schemas.openxmlformats.org/presentationml/2006/main">
   <p:cSld>
     <p:spTree>
@@ -23538,7 +23733,7 @@
           <a:p>
             <a:fld id="{8346BD07-4451-4F99-9781-57091C949674}" type="slidenum">
               <a:rPr lang="ru-RU" smtClean="0"/>
-              <a:t>24</a:t>
+              <a:t>25</a:t>
             </a:fld>
             <a:endParaRPr lang="ru-RU"/>
           </a:p>
@@ -23586,7 +23781,7 @@
 </p:sld>
 </file>
 
-<file path=ppt/slides/slide25.xml><?xml version="1.0" encoding="utf-8"?>
+<file path=ppt/slides/slide26.xml><?xml version="1.0" encoding="utf-8"?>
 <p:sld xmlns:a="http://schemas.openxmlformats.org/drawingml/2006/main" xmlns:r="http://schemas.openxmlformats.org/officeDocument/2006/relationships" xmlns:p="http://schemas.openxmlformats.org/presentationml/2006/main">
   <p:cSld>
     <p:spTree>
@@ -23639,7 +23834,7 @@
                 <a:latin typeface="Times New Roman" panose="02020603050405020304" pitchFamily="18" charset="0"/>
                 <a:cs typeface="Times New Roman" panose="02020603050405020304" pitchFamily="18" charset="0"/>
               </a:rPr>
-              <a:t>25</a:t>
+              <a:t>26</a:t>
             </a:fld>
             <a:endParaRPr lang="ru-RU" sz="1400" b="1" dirty="0">
               <a:solidFill>
@@ -25751,7 +25946,7 @@
 </p:sld>
 </file>
 
-<file path=ppt/slides/slide26.xml><?xml version="1.0" encoding="utf-8"?>
+<file path=ppt/slides/slide27.xml><?xml version="1.0" encoding="utf-8"?>
 <p:sld xmlns:a="http://schemas.openxmlformats.org/drawingml/2006/main" xmlns:r="http://schemas.openxmlformats.org/officeDocument/2006/relationships" xmlns:p="http://schemas.openxmlformats.org/presentationml/2006/main">
   <p:cSld>
     <p:spTree>
@@ -25804,7 +25999,7 @@
                 <a:latin typeface="Times New Roman" panose="02020603050405020304" pitchFamily="18" charset="0"/>
                 <a:cs typeface="Times New Roman" panose="02020603050405020304" pitchFamily="18" charset="0"/>
               </a:rPr>
-              <a:t>26</a:t>
+              <a:t>27</a:t>
             </a:fld>
             <a:endParaRPr lang="ru-RU" sz="1400" b="1" dirty="0">
               <a:solidFill>
